--- a/m8/diapositivos/sessao-05-m8-f06.pptx
+++ b/m8/diapositivos/sessao-05-m8-f06.pptx
@@ -1879,7 +1879,7 @@
               <a:buNone/>
             </a:pPr>
             <a:r>
-              <a:rPr lang="en-US" sz="2000" dirty="0">
+              <a:rPr lang="en-US" sz="2000" b="1" dirty="0">
                 <a:solidFill>
                   <a:srgbClr val="F2F0EA"/>
                 </a:solidFill>
@@ -1887,11 +1887,8 @@
                 <a:ea typeface="Georgia" pitchFamily="34" charset="-122"/>
                 <a:cs typeface="Georgia" pitchFamily="34" charset="-120"/>
               </a:rPr>
-              <a:t>Valor aspetual: como se apresenta a situação no tempo.</a:t>
-            </a:r>
-            <a:endParaRPr lang="en-US" sz="2000" dirty="0"/>
-          </a:p>
-          <a:p>
+              <a:t>Valor aspetual</a:t>
+            </a:r>
             <a:pPr indent="0" marL="0">
               <a:lnSpc>
                 <a:spcPct val="120000"/>
@@ -1910,11 +1907,8 @@
                 <a:ea typeface="Georgia" pitchFamily="34" charset="-122"/>
                 <a:cs typeface="Georgia" pitchFamily="34" charset="-120"/>
               </a:rPr>
-              <a:t>Perfetivo (concluída: «leu o poema»); imperfetivo (em curso, sem fim marcado: «lia»); habitual («costuma escrever», «escreve todas as manhãs»); iterativo (repetida um certo número de vezes: «releu o verso três vezes»); genérico (verdade geral: «os poetas observam»).</a:t>
-            </a:r>
-            <a:endParaRPr lang="en-US" sz="2000" dirty="0"/>
-          </a:p>
-          <a:p>
+              <a:t>: como se apresenta a situação no tempo. </a:t>
+            </a:r>
             <a:pPr indent="0" marL="0">
               <a:lnSpc>
                 <a:spcPct val="120000"/>
@@ -1925,7 +1919,7 @@
               <a:buNone/>
             </a:pPr>
             <a:r>
-              <a:rPr lang="en-US" sz="2000" dirty="0">
+              <a:rPr lang="en-US" sz="2000" b="1" dirty="0">
                 <a:solidFill>
                   <a:srgbClr val="F2F0EA"/>
                 </a:solidFill>
@@ -1933,11 +1927,8 @@
                 <a:ea typeface="Georgia" pitchFamily="34" charset="-122"/>
                 <a:cs typeface="Georgia" pitchFamily="34" charset="-120"/>
               </a:rPr>
-              <a:t>Situações estativas (estados: «saber», «ser») e eventos (ações ou processos: «escrever», «chegar»).</a:t>
-            </a:r>
-            <a:endParaRPr lang="en-US" sz="2000" dirty="0"/>
-          </a:p>
-          <a:p>
+              <a:t>Perfetivo</a:t>
+            </a:r>
             <a:pPr indent="0" marL="0">
               <a:lnSpc>
                 <a:spcPct val="120000"/>
@@ -1956,11 +1947,8 @@
                 <a:ea typeface="Georgia" pitchFamily="34" charset="-122"/>
                 <a:cs typeface="Georgia" pitchFamily="34" charset="-120"/>
               </a:rPr>
-              <a:t>Anáfora: expressão que retoma algo já dito («Li o conto. Ele surpreendeu-me»).</a:t>
-            </a:r>
-            <a:endParaRPr lang="en-US" sz="2000" dirty="0"/>
-          </a:p>
-          <a:p>
+              <a:t> (concluída: «leu o poema»); </a:t>
+            </a:r>
             <a:pPr indent="0" marL="0">
               <a:lnSpc>
                 <a:spcPct val="120000"/>
@@ -1971,7 +1959,7 @@
               <a:buNone/>
             </a:pPr>
             <a:r>
-              <a:rPr lang="en-US" sz="2000" dirty="0">
+              <a:rPr lang="en-US" sz="2000" b="1" dirty="0">
                 <a:solidFill>
                   <a:srgbClr val="F2F0EA"/>
                 </a:solidFill>
@@ -1979,7 +1967,330 @@
                 <a:ea typeface="Georgia" pitchFamily="34" charset="-122"/>
                 <a:cs typeface="Georgia" pitchFamily="34" charset="-120"/>
               </a:rPr>
-              <a:t>Catáfora: expressão que antecipa algo que vem depois («Isto é o que quero: silêncio»).</a:t>
+              <a:t>imperfetivo</a:t>
+            </a:r>
+            <a:pPr indent="0" marL="0">
+              <a:lnSpc>
+                <a:spcPct val="120000"/>
+              </a:lnSpc>
+              <a:spcAft>
+                <a:spcPts val="1000"/>
+              </a:spcAft>
+              <a:buNone/>
+            </a:pPr>
+            <a:r>
+              <a:rPr lang="en-US" sz="2000" dirty="0">
+                <a:solidFill>
+                  <a:srgbClr val="F2F0EA"/>
+                </a:solidFill>
+                <a:latin typeface="Georgia" pitchFamily="34" charset="0"/>
+                <a:ea typeface="Georgia" pitchFamily="34" charset="-122"/>
+                <a:cs typeface="Georgia" pitchFamily="34" charset="-120"/>
+              </a:rPr>
+              <a:t> (em curso, sem fim marcado: «lia»); </a:t>
+            </a:r>
+            <a:pPr indent="0" marL="0">
+              <a:lnSpc>
+                <a:spcPct val="120000"/>
+              </a:lnSpc>
+              <a:spcAft>
+                <a:spcPts val="1000"/>
+              </a:spcAft>
+              <a:buNone/>
+            </a:pPr>
+            <a:r>
+              <a:rPr lang="en-US" sz="2000" b="1" dirty="0">
+                <a:solidFill>
+                  <a:srgbClr val="F2F0EA"/>
+                </a:solidFill>
+                <a:latin typeface="Georgia" pitchFamily="34" charset="0"/>
+                <a:ea typeface="Georgia" pitchFamily="34" charset="-122"/>
+                <a:cs typeface="Georgia" pitchFamily="34" charset="-120"/>
+              </a:rPr>
+              <a:t>habitual</a:t>
+            </a:r>
+            <a:pPr indent="0" marL="0">
+              <a:lnSpc>
+                <a:spcPct val="120000"/>
+              </a:lnSpc>
+              <a:spcAft>
+                <a:spcPts val="1000"/>
+              </a:spcAft>
+              <a:buNone/>
+            </a:pPr>
+            <a:r>
+              <a:rPr lang="en-US" sz="2000" dirty="0">
+                <a:solidFill>
+                  <a:srgbClr val="F2F0EA"/>
+                </a:solidFill>
+                <a:latin typeface="Georgia" pitchFamily="34" charset="0"/>
+                <a:ea typeface="Georgia" pitchFamily="34" charset="-122"/>
+                <a:cs typeface="Georgia" pitchFamily="34" charset="-120"/>
+              </a:rPr>
+              <a:t> («costuma escrever», «escreve todas as manhãs»); </a:t>
+            </a:r>
+            <a:pPr indent="0" marL="0">
+              <a:lnSpc>
+                <a:spcPct val="120000"/>
+              </a:lnSpc>
+              <a:spcAft>
+                <a:spcPts val="1000"/>
+              </a:spcAft>
+              <a:buNone/>
+            </a:pPr>
+            <a:r>
+              <a:rPr lang="en-US" sz="2000" b="1" dirty="0">
+                <a:solidFill>
+                  <a:srgbClr val="F2F0EA"/>
+                </a:solidFill>
+                <a:latin typeface="Georgia" pitchFamily="34" charset="0"/>
+                <a:ea typeface="Georgia" pitchFamily="34" charset="-122"/>
+                <a:cs typeface="Georgia" pitchFamily="34" charset="-120"/>
+              </a:rPr>
+              <a:t>iterativo</a:t>
+            </a:r>
+            <a:pPr indent="0" marL="0">
+              <a:lnSpc>
+                <a:spcPct val="120000"/>
+              </a:lnSpc>
+              <a:spcAft>
+                <a:spcPts val="1000"/>
+              </a:spcAft>
+              <a:buNone/>
+            </a:pPr>
+            <a:r>
+              <a:rPr lang="en-US" sz="2000" dirty="0">
+                <a:solidFill>
+                  <a:srgbClr val="F2F0EA"/>
+                </a:solidFill>
+                <a:latin typeface="Georgia" pitchFamily="34" charset="0"/>
+                <a:ea typeface="Georgia" pitchFamily="34" charset="-122"/>
+                <a:cs typeface="Georgia" pitchFamily="34" charset="-120"/>
+              </a:rPr>
+              <a:t> (repetida um certo número de vezes: «releu o verso três vezes»); </a:t>
+            </a:r>
+            <a:pPr indent="0" marL="0">
+              <a:lnSpc>
+                <a:spcPct val="120000"/>
+              </a:lnSpc>
+              <a:spcAft>
+                <a:spcPts val="1000"/>
+              </a:spcAft>
+              <a:buNone/>
+            </a:pPr>
+            <a:r>
+              <a:rPr lang="en-US" sz="2000" b="1" dirty="0">
+                <a:solidFill>
+                  <a:srgbClr val="F2F0EA"/>
+                </a:solidFill>
+                <a:latin typeface="Georgia" pitchFamily="34" charset="0"/>
+                <a:ea typeface="Georgia" pitchFamily="34" charset="-122"/>
+                <a:cs typeface="Georgia" pitchFamily="34" charset="-120"/>
+              </a:rPr>
+              <a:t>genérico</a:t>
+            </a:r>
+            <a:pPr indent="0" marL="0">
+              <a:lnSpc>
+                <a:spcPct val="120000"/>
+              </a:lnSpc>
+              <a:spcAft>
+                <a:spcPts val="1000"/>
+              </a:spcAft>
+              <a:buNone/>
+            </a:pPr>
+            <a:r>
+              <a:rPr lang="en-US" sz="2000" dirty="0">
+                <a:solidFill>
+                  <a:srgbClr val="F2F0EA"/>
+                </a:solidFill>
+                <a:latin typeface="Georgia" pitchFamily="34" charset="0"/>
+                <a:ea typeface="Georgia" pitchFamily="34" charset="-122"/>
+                <a:cs typeface="Georgia" pitchFamily="34" charset="-120"/>
+              </a:rPr>
+              <a:t> (verdade geral: «os poetas observam»).</a:t>
+            </a:r>
+            <a:endParaRPr lang="en-US" sz="2000" dirty="0"/>
+          </a:p>
+          <a:p>
+            <a:pPr indent="0" marL="0">
+              <a:lnSpc>
+                <a:spcPct val="120000"/>
+              </a:lnSpc>
+              <a:spcAft>
+                <a:spcPts val="1000"/>
+              </a:spcAft>
+              <a:buNone/>
+            </a:pPr>
+            <a:r>
+              <a:rPr lang="en-US" sz="2000" dirty="0">
+                <a:solidFill>
+                  <a:srgbClr val="F2F0EA"/>
+                </a:solidFill>
+                <a:latin typeface="Georgia" pitchFamily="34" charset="0"/>
+                <a:ea typeface="Georgia" pitchFamily="34" charset="-122"/>
+                <a:cs typeface="Georgia" pitchFamily="34" charset="-120"/>
+              </a:rPr>
+              <a:t>Situações </a:t>
+            </a:r>
+            <a:pPr indent="0" marL="0">
+              <a:lnSpc>
+                <a:spcPct val="120000"/>
+              </a:lnSpc>
+              <a:spcAft>
+                <a:spcPts val="1000"/>
+              </a:spcAft>
+              <a:buNone/>
+            </a:pPr>
+            <a:r>
+              <a:rPr lang="en-US" sz="2000" b="1" dirty="0">
+                <a:solidFill>
+                  <a:srgbClr val="F2F0EA"/>
+                </a:solidFill>
+                <a:latin typeface="Georgia" pitchFamily="34" charset="0"/>
+                <a:ea typeface="Georgia" pitchFamily="34" charset="-122"/>
+                <a:cs typeface="Georgia" pitchFamily="34" charset="-120"/>
+              </a:rPr>
+              <a:t>estativas</a:t>
+            </a:r>
+            <a:pPr indent="0" marL="0">
+              <a:lnSpc>
+                <a:spcPct val="120000"/>
+              </a:lnSpc>
+              <a:spcAft>
+                <a:spcPts val="1000"/>
+              </a:spcAft>
+              <a:buNone/>
+            </a:pPr>
+            <a:r>
+              <a:rPr lang="en-US" sz="2000" dirty="0">
+                <a:solidFill>
+                  <a:srgbClr val="F2F0EA"/>
+                </a:solidFill>
+                <a:latin typeface="Georgia" pitchFamily="34" charset="0"/>
+                <a:ea typeface="Georgia" pitchFamily="34" charset="-122"/>
+                <a:cs typeface="Georgia" pitchFamily="34" charset="-120"/>
+              </a:rPr>
+              <a:t> (estados: «saber», «ser») e </a:t>
+            </a:r>
+            <a:pPr indent="0" marL="0">
+              <a:lnSpc>
+                <a:spcPct val="120000"/>
+              </a:lnSpc>
+              <a:spcAft>
+                <a:spcPts val="1000"/>
+              </a:spcAft>
+              <a:buNone/>
+            </a:pPr>
+            <a:r>
+              <a:rPr lang="en-US" sz="2000" b="1" dirty="0">
+                <a:solidFill>
+                  <a:srgbClr val="F2F0EA"/>
+                </a:solidFill>
+                <a:latin typeface="Georgia" pitchFamily="34" charset="0"/>
+                <a:ea typeface="Georgia" pitchFamily="34" charset="-122"/>
+                <a:cs typeface="Georgia" pitchFamily="34" charset="-120"/>
+              </a:rPr>
+              <a:t>eventos</a:t>
+            </a:r>
+            <a:pPr indent="0" marL="0">
+              <a:lnSpc>
+                <a:spcPct val="120000"/>
+              </a:lnSpc>
+              <a:spcAft>
+                <a:spcPts val="1000"/>
+              </a:spcAft>
+              <a:buNone/>
+            </a:pPr>
+            <a:r>
+              <a:rPr lang="en-US" sz="2000" dirty="0">
+                <a:solidFill>
+                  <a:srgbClr val="F2F0EA"/>
+                </a:solidFill>
+                <a:latin typeface="Georgia" pitchFamily="34" charset="0"/>
+                <a:ea typeface="Georgia" pitchFamily="34" charset="-122"/>
+                <a:cs typeface="Georgia" pitchFamily="34" charset="-120"/>
+              </a:rPr>
+              <a:t> (ações ou processos: «escrever», «chegar»). </a:t>
+            </a:r>
+            <a:pPr indent="0" marL="0">
+              <a:lnSpc>
+                <a:spcPct val="120000"/>
+              </a:lnSpc>
+              <a:spcAft>
+                <a:spcPts val="1000"/>
+              </a:spcAft>
+              <a:buNone/>
+            </a:pPr>
+            <a:r>
+              <a:rPr lang="en-US" sz="2000" b="1" dirty="0">
+                <a:solidFill>
+                  <a:srgbClr val="F2F0EA"/>
+                </a:solidFill>
+                <a:latin typeface="Georgia" pitchFamily="34" charset="0"/>
+                <a:ea typeface="Georgia" pitchFamily="34" charset="-122"/>
+                <a:cs typeface="Georgia" pitchFamily="34" charset="-120"/>
+              </a:rPr>
+              <a:t>Anáfora</a:t>
+            </a:r>
+            <a:pPr indent="0" marL="0">
+              <a:lnSpc>
+                <a:spcPct val="120000"/>
+              </a:lnSpc>
+              <a:spcAft>
+                <a:spcPts val="1000"/>
+              </a:spcAft>
+              <a:buNone/>
+            </a:pPr>
+            <a:r>
+              <a:rPr lang="en-US" sz="2000" dirty="0">
+                <a:solidFill>
+                  <a:srgbClr val="F2F0EA"/>
+                </a:solidFill>
+                <a:latin typeface="Georgia" pitchFamily="34" charset="0"/>
+                <a:ea typeface="Georgia" pitchFamily="34" charset="-122"/>
+                <a:cs typeface="Georgia" pitchFamily="34" charset="-120"/>
+              </a:rPr>
+              <a:t>: expressão que retoma algo já dito («Li o conto. Ele surpreendeu-me»). </a:t>
+            </a:r>
+            <a:pPr indent="0" marL="0">
+              <a:lnSpc>
+                <a:spcPct val="120000"/>
+              </a:lnSpc>
+              <a:spcAft>
+                <a:spcPts val="1000"/>
+              </a:spcAft>
+              <a:buNone/>
+            </a:pPr>
+            <a:r>
+              <a:rPr lang="en-US" sz="2000" b="1" dirty="0">
+                <a:solidFill>
+                  <a:srgbClr val="F2F0EA"/>
+                </a:solidFill>
+                <a:latin typeface="Georgia" pitchFamily="34" charset="0"/>
+                <a:ea typeface="Georgia" pitchFamily="34" charset="-122"/>
+                <a:cs typeface="Georgia" pitchFamily="34" charset="-120"/>
+              </a:rPr>
+              <a:t>Catáfora</a:t>
+            </a:r>
+            <a:pPr indent="0" marL="0">
+              <a:lnSpc>
+                <a:spcPct val="120000"/>
+              </a:lnSpc>
+              <a:spcAft>
+                <a:spcPts val="1000"/>
+              </a:spcAft>
+              <a:buNone/>
+            </a:pPr>
+            <a:r>
+              <a:rPr lang="en-US" sz="2000" dirty="0">
+                <a:solidFill>
+                  <a:srgbClr val="F2F0EA"/>
+                </a:solidFill>
+                <a:latin typeface="Georgia" pitchFamily="34" charset="0"/>
+                <a:ea typeface="Georgia" pitchFamily="34" charset="-122"/>
+                <a:cs typeface="Georgia" pitchFamily="34" charset="-120"/>
+              </a:rPr>
+              <a:t>: expressão que antecipa algo que vem depois («Isto é o que quero: silêncio»).</a:t>
             </a:r>
             <a:endParaRPr lang="en-US" sz="2000" dirty="0"/>
           </a:p>
